--- a/Assignment2_Logistics/Logistics_Presentation.pptx
+++ b/Assignment2_Logistics/Logistics_Presentation.pptx
@@ -13,9 +13,10 @@
     <p:sldId id="261" r:id="rId7"/>
     <p:sldId id="262" r:id="rId8"/>
     <p:sldId id="263" r:id="rId9"/>
+    <p:sldId id="264" r:id="rId10"/>
   </p:sldIdLst>
   <p:notesMasterIdLst>
-    <p:notesMasterId r:id="rId10"/>
+    <p:notesMasterId r:id="rId11"/>
   </p:notesMasterIdLst>
   <p:sldSz cx="12192000" cy="6858000"/>
   <p:notesSz cx="6858000" cy="12192000"/>
@@ -114,32 +115,33 @@
   <p:extLst>
     <p:ext uri="{521415D9-36F7-43E2-AB2F-B90AF26B5E84}">
       <p14:sectionLst xmlns:p14="http://schemas.microsoft.com/office/powerpoint/2010/main">
-        <p14:section name="Introduction" id="{e7d7fd4d-d92a-e3dd-1f9b-e61f7158e2c7}">
+        <p14:section name="Introduction" id="{a4dcd37c-f658-ec26-6612-ebbe422ffd59}">
           <p14:sldIdLst>
             <p14:sldId id="256"/>
-          </p14:sldIdLst>
-        </p14:section>
-        <p14:section name="Process" id="{69642ede-57dd-fa05-71fc-8d445f061204}">
-          <p14:sldIdLst>
             <p14:sldId id="257"/>
           </p14:sldIdLst>
         </p14:section>
-        <p14:section name="Task types, gateways and events" id="{f3a6ecbe-cbd1-a567-95c6-81c8c5215880}">
+        <p14:section name="Process" id="{f3c53518-6b0f-2b1d-82ad-f6c7164b7900}">
           <p14:sldIdLst>
             <p14:sldId id="258"/>
+          </p14:sldIdLst>
+        </p14:section>
+        <p14:section name="Task types, gateways and events" id="{83d30a81-ecdc-0260-55d8-ac788d7da341}">
+          <p14:sldIdLst>
             <p14:sldId id="259"/>
             <p14:sldId id="260"/>
+            <p14:sldId id="261"/>
           </p14:sldIdLst>
         </p14:section>
-        <p14:section name="Critical and alternate paths" id="{16ed6688-00f5-d037-c1f8-c8d8d6d67b5c}">
+        <p14:section name="Critical and alternate paths" id="{1efbe0b3-f682-9194-12bd-5c2b8c398025}">
           <p14:sldIdLst>
-            <p14:sldId id="261"/>
             <p14:sldId id="262"/>
+            <p14:sldId id="263"/>
           </p14:sldIdLst>
         </p14:section>
-        <p14:section name="Summary" id="{9793f782-e6e4-6eb1-9b98-074661c6e4cf}">
+        <p14:section name="Summary" id="{b95a3ef9-2c1c-ef41-1573-5c518ca196ab}">
           <p14:sldIdLst>
-            <p14:sldId id="263"/>
+            <p14:sldId id="264"/>
           </p14:sldIdLst>
         </p14:section>
       </p14:sectionLst>
@@ -634,7 +636,7 @@
           <a:p>
             <a:r>
               <a:rPr lang="en-US" dirty="0"/>
-              <a:t>This is the full diagram. The shipper and the recipient are external, so they are separate pools and only exchange messages with us (the dashed lines). Inside the courier pool there is one lane per role: Control Tower, Pickup Agent, Hub, Claims and Delivery Agent. The main flow runs left to right; exceptions branch off near where they happen and end in two shared handlers: Return to sender in the hub lane and Settle claim in the claims lane.</a:t>
+              <a:t>This is the question I chose. A courier company moves parcels from a shipper to a recipient, and the focus is on detecting and resolving exceptions. The process starts when a shipper books a shipment, and ends when the parcel is delivered, returned, or closed as lost or cancelled. We had to draw the happy path, find the failure paths, solve each one inside the diagram, and justify the task types and gateways. The right side lists the areas the question told us to look at for failures.</a:t>
             </a:r>
             <a:endParaRPr lang="en-US" dirty="0"/>
           </a:p>
@@ -722,7 +724,7 @@
           <a:p>
             <a:r>
               <a:rPr lang="en-US" dirty="0"/>
-              <a:t>There are eleven tasks of six different types, and each type was chosen for a reason. Validate booking is a business rule task because rules decide the result, in a DMN table. Collect parcel, Attempt delivery and Settle claim are user tasks because a person decides, using a form. Send tasks send one-way messages to the shipper. Transport and Customs are receive tasks because the process waits for a message, the arrival scan or the clearance, and a receive task can carry a timer. Count attempt is a script task: it just adds one to a counter. Hand over and Return are manual tasks: physical work with no system.</a:t>
+              <a:t>This is the full diagram. The shipper and the recipient are external, so they are separate pools and only exchange messages with us (the dashed lines). Inside the courier pool there is one lane per role: Control Tower, Pickup Agent, Hub, Claims and Delivery Agent. The main flow runs left to right; exceptions branch off near where they happen and end in two shared handlers: Return to sender in the hub lane and Settle claim in the claims lane.</a:t>
             </a:r>
             <a:endParaRPr lang="en-US" dirty="0"/>
           </a:p>
@@ -810,7 +812,7 @@
           <a:p>
             <a:r>
               <a:rPr lang="en-US" dirty="0"/>
-              <a:t>Two gateway types. Exclusive gateways, the X, are used for every decision: exactly one path is taken. Booking valid, Collected, International, the four-way delivery Outcome, and Attempts less than three, which limits the retry loop. Exclusive gateways are also used as merges where paths join again. The parallel gateway, the plus, is used after pickup: handing the parcel over at the hub and sending the tracking number are independent, so they run at the same time, and the join waits for both before transport starts.</a:t>
+              <a:t>There are eleven tasks of six different types, and each type was chosen for a reason. Validate booking is a business rule task because rules decide the result, in a DMN table. Collect parcel, Attempt delivery and Settle claim are user tasks because a person decides, using a form. Send tasks send one-way messages to the shipper. Transport and Customs are receive tasks because the process waits for a message, the arrival scan or the clearance, and a receive task can carry a timer. Count attempt is a script task: it just adds one to a counter. Hand over and Return are manual tasks: physical work with no system.</a:t>
             </a:r>
             <a:endParaRPr lang="en-US" dirty="0"/>
           </a:p>
@@ -898,7 +900,7 @@
           <a:p>
             <a:r>
               <a:rPr lang="en-US" dirty="0"/>
-              <a:t>Five intermediate events. Three are attached to the Transport task. ETA exceeded is a non-interrupting timer, drawn dashed: the shipper gets a delay notice but the transport keeps going. No scan for 48 hours is an interrupting timer: the parcel is treated as lost and goes to claims. Cancellation requested is an interrupting message event: the shipper cancels, transport stops, and the parcel goes back. Held more than 5 days is a timer on customs. Next day is an intermediate catch timer inside the delivery retry loop.</a:t>
+              <a:t>Two gateway types. Exclusive gateways, the X, are used for every decision: exactly one path is taken. Booking valid, Collected, International, the four-way delivery Outcome, and Attempts less than three, which limits the retry loop. Exclusive gateways are also used as merges where paths join again. The parallel gateway, the plus, is used after pickup: handing the parcel over at the hub and sending the tracking number are independent, so they run at the same time, and the join waits for both before transport starts.</a:t>
             </a:r>
             <a:endParaRPr lang="en-US" dirty="0"/>
           </a:p>
@@ -986,7 +988,7 @@
           <a:p>
             <a:r>
               <a:rPr lang="en-US" dirty="0"/>
-              <a:t>The critical path, or happy path, is what happens when nothing goes wrong. Booking received, validate, collect, then hand over and tracking in parallel, transport, customs only if international, and delivery. Every gateway takes its normal branch: booking valid yes, collected yes, outcome delivered.</a:t>
+              <a:t>Five intermediate events. Three are attached to the Transport task. ETA exceeded is a non-interrupting timer, drawn dashed: the shipper gets a delay notice but the transport keeps going. No scan for 48 hours is an interrupting timer: the parcel is treated as lost and goes to claims. Cancellation requested is an interrupting message event: the shipper cancels, transport stops, and the parcel goes back. Held more than 5 days is a timer on customs. Next day is an intermediate catch timer inside the delivery retry loop.</a:t>
             </a:r>
             <a:endParaRPr lang="en-US" dirty="0"/>
           </a:p>
@@ -1074,7 +1076,7 @@
           <a:p>
             <a:r>
               <a:rPr lang="en-US" dirty="0"/>
-              <a:t>These are the alternate paths: nine exceptions, each solved inside the diagram. Most end in one of two shared handlers, Return to sender or Settle claim, which keeps the diagram small. The delay path is special because it is non-interrupting: it runs alongside the normal path. The not-home path is a loop with a limit: count the attempt, wait a day, retry, and after three attempts the parcel is returned.</a:t>
+              <a:t>The critical path, or happy path, is what happens when nothing goes wrong. Booking received, validate, collect, then hand over and tracking in parallel, transport, customs only if international, and delivery. Every gateway takes its normal branch: booking valid yes, collected yes, outcome delivered.</a:t>
             </a:r>
             <a:endParaRPr lang="en-US" dirty="0"/>
           </a:p>
@@ -1162,7 +1164,7 @@
           <a:p>
             <a:r>
               <a:rPr lang="en-US" dirty="0"/>
-              <a:t>To summarise: six task types, two gateway types, five intermediate events, one critical path and nine alternate paths. Every exception the question mentions is detected and resolved inside the model. Thank you, I am happy to take questions.</a:t>
+              <a:t>These are the alternate paths: nine exceptions, each solved inside the diagram. Most end in one of two shared handlers, Return to sender or Settle claim, which keeps the diagram small. The delay path is special because it is non-interrupting: it runs alongside the normal path. The not-home path is a loop with a limit: count the attempt, wait a day, retry, and after three attempts the parcel is returned.</a:t>
             </a:r>
             <a:endParaRPr lang="en-US" dirty="0"/>
           </a:p>
@@ -1186,6 +1188,94 @@
             <a:fld id="{F7021451-1387-4CA6-816F-3879F97B5CBC}" type="slidenum">
               <a:rPr lang="en-US"/>
               <a:t>8</a:t>
+            </a:fld>
+            <a:endParaRPr lang="en-US"/>
+          </a:p>
+        </p:txBody>
+      </p:sp>
+    </p:spTree>
+    <p:extLst>
+      <p:ext uri="{BB962C8B-B14F-4D97-AF65-F5344CB8AC3E}">
+        <p14:creationId xmlns:p14="http://schemas.microsoft.com/office/powerpoint/2010/main" val="1024086991"/>
+      </p:ext>
+    </p:extLst>
+  </p:cSld>
+  <p:clrMapOvr>
+    <a:masterClrMapping/>
+  </p:clrMapOvr>
+</p:notes>
+</file>
+
+<file path=ppt/notesSlides/notesSlide9.xml><?xml version="1.0" encoding="utf-8"?>
+<p:notes xmlns:a="http://schemas.openxmlformats.org/drawingml/2006/main" xmlns:r="http://schemas.openxmlformats.org/officeDocument/2006/relationships" xmlns:p="http://schemas.openxmlformats.org/presentationml/2006/main">
+  <p:cSld>
+    <p:spTree>
+      <p:nvGrpSpPr>
+        <p:cNvPr id="1" name=""/>
+        <p:cNvGrpSpPr/>
+        <p:nvPr/>
+      </p:nvGrpSpPr>
+      <p:grpSpPr>
+        <a:xfrm>
+          <a:off x="0" y="0"/>
+          <a:ext cx="0" cy="0"/>
+          <a:chOff x="0" y="0"/>
+          <a:chExt cx="0" cy="0"/>
+        </a:xfrm>
+      </p:grpSpPr>
+      <p:sp>
+        <p:nvSpPr>
+          <p:cNvPr id="2" name="Slide Image Placeholder 1"/>
+          <p:cNvSpPr>
+            <a:spLocks noGrp="1" noRot="1" noChangeAspect="1"/>
+          </p:cNvSpPr>
+          <p:nvPr>
+            <p:ph type="sldImg"/>
+          </p:nvPr>
+        </p:nvSpPr>
+        <p:spPr/>
+      </p:sp>
+      <p:sp>
+        <p:nvSpPr>
+          <p:cNvPr id="3" name="Notes Placeholder 2"/>
+          <p:cNvSpPr>
+            <a:spLocks noGrp="1"/>
+          </p:cNvSpPr>
+          <p:nvPr>
+            <p:ph type="body" idx="1"/>
+          </p:nvPr>
+        </p:nvSpPr>
+        <p:spPr/>
+        <p:txBody>
+          <a:bodyPr/>
+          <a:lstStyle/>
+          <a:p>
+            <a:r>
+              <a:rPr lang="en-US" dirty="0"/>
+              <a:t>To summarise: six task types, two gateway types, five intermediate events, one critical path and nine alternate paths. Every exception the question mentions is detected and resolved inside the model. Thank you.</a:t>
+            </a:r>
+            <a:endParaRPr lang="en-US" dirty="0"/>
+          </a:p>
+        </p:txBody>
+      </p:sp>
+      <p:sp>
+        <p:nvSpPr>
+          <p:cNvPr id="4" name="Slide Number Placeholder 3"/>
+          <p:cNvSpPr>
+            <a:spLocks noGrp="1"/>
+          </p:cNvSpPr>
+          <p:nvPr>
+            <p:ph type="sldNum" sz="quarter" idx="10"/>
+          </p:nvPr>
+        </p:nvSpPr>
+        <p:spPr/>
+        <p:txBody>
+          <a:bodyPr/>
+          <a:lstStyle/>
+          <a:p>
+            <a:fld id="{F7021451-1387-4CA6-816F-3879F97B5CBC}" type="slidenum">
+              <a:rPr lang="en-US"/>
+              <a:t>9</a:t>
             </a:fld>
             <a:endParaRPr lang="en-US"/>
           </a:p>
@@ -2207,7 +2297,7 @@
                 <a:ea typeface="Cambria" pitchFamily="34" charset="-122"/>
                 <a:cs typeface="Cambria" pitchFamily="34" charset="-120"/>
               </a:rPr>
-              <a:t>Process overview</a:t>
+              <a:t>The question</a:t>
             </a:r>
             <a:endParaRPr lang="en-US" sz="3200" dirty="0"/>
           </a:p>
@@ -2221,8 +2311,71 @@
         </p:nvSpPr>
         <p:spPr>
           <a:xfrm>
-            <a:off x="548640" y="1051560"/>
-            <a:ext cx="11064240" cy="365760"/>
+            <a:off x="548640" y="1234440"/>
+            <a:ext cx="6126480" cy="1463040"/>
+          </a:xfrm>
+          <a:prstGeom prst="rect">
+            <a:avLst/>
+          </a:prstGeom>
+          <a:noFill/>
+          <a:ln/>
+        </p:spPr>
+        <p:txBody>
+          <a:bodyPr wrap="square" lIns="0" tIns="0" rIns="0" bIns="0" rtlCol="0" anchor="t"/>
+          <a:lstStyle/>
+          <a:p>
+            <a:pPr indent="0" marL="0">
+              <a:buNone/>
+            </a:pPr>
+            <a:r>
+              <a:rPr lang="en-US" sz="1600" dirty="0">
+                <a:solidFill>
+                  <a:srgbClr val="3A4659"/>
+                </a:solidFill>
+              </a:rPr>
+              <a:t>A courier company moves parcels from a shipper to a recipient through pickup, hubs and last-mile delivery. Most shipments arrive fine, but many things can go wrong. Model the full shipment life cycle, focusing on how exceptions are detected and resolved.</a:t>
+            </a:r>
+            <a:endParaRPr lang="en-US" sz="1600" dirty="0"/>
+          </a:p>
+        </p:txBody>
+      </p:sp>
+      <p:sp>
+        <p:nvSpPr>
+          <p:cNvPr id="4" name="start end box"/>
+          <p:cNvSpPr/>
+          <p:nvPr/>
+        </p:nvSpPr>
+        <p:spPr>
+          <a:xfrm>
+            <a:off x="548640" y="2834640"/>
+            <a:ext cx="6126480" cy="1143000"/>
+          </a:xfrm>
+          <a:prstGeom prst="roundRect">
+            <a:avLst>
+              <a:gd name="adj" fmla="val 8000"/>
+            </a:avLst>
+          </a:prstGeom>
+          <a:solidFill>
+            <a:srgbClr val="EEF1F5"/>
+          </a:solidFill>
+          <a:ln w="12700">
+            <a:solidFill>
+              <a:srgbClr val="EEF1F5"/>
+            </a:solidFill>
+            <a:prstDash val="solid"/>
+          </a:ln>
+        </p:spPr>
+      </p:sp>
+      <p:sp>
+        <p:nvSpPr>
+          <p:cNvPr id="5" name="Text 3"/>
+          <p:cNvSpPr txBox="1"/>
+          <p:nvPr/>
+        </p:nvSpPr>
+        <p:spPr>
+          <a:xfrm>
+            <a:off x="777240" y="2926080"/>
+            <a:ext cx="5760720" cy="960120"/>
           </a:xfrm>
           <a:prstGeom prst="rect">
             <a:avLst/>
@@ -2235,69 +2388,494 @@
           <a:lstStyle/>
           <a:p>
             <a:pPr indent="0" marL="0">
+              <a:spcAft>
+                <a:spcPts val="400"/>
+              </a:spcAft>
               <a:buNone/>
+            </a:pPr>
+            <a:r>
+              <a:rPr lang="en-US" sz="1500" b="1" dirty="0">
+                <a:solidFill>
+                  <a:srgbClr val="13203A"/>
+                </a:solidFill>
+              </a:rPr>
+              <a:t>Starts: </a:t>
+            </a:r>
+            <a:pPr indent="0" marL="0">
+              <a:spcAft>
+                <a:spcPts val="400"/>
+              </a:spcAft>
+              <a:buNone/>
+            </a:pPr>
+            <a:r>
+              <a:rPr lang="en-US" sz="1500" dirty="0">
+                <a:solidFill>
+                  <a:srgbClr val="3A4659"/>
+                </a:solidFill>
+              </a:rPr>
+              <a:t>a shipper books a shipment</a:t>
+            </a:r>
+            <a:endParaRPr lang="en-US" sz="1500" dirty="0"/>
+          </a:p>
+          <a:p>
+            <a:pPr indent="0" marL="0">
+              <a:spcAft>
+                <a:spcPts val="400"/>
+              </a:spcAft>
+              <a:buNone/>
+            </a:pPr>
+            <a:r>
+              <a:rPr lang="en-US" sz="1500" b="1" dirty="0">
+                <a:solidFill>
+                  <a:srgbClr val="13203A"/>
+                </a:solidFill>
+              </a:rPr>
+              <a:t>Ends: </a:t>
+            </a:r>
+            <a:pPr indent="0" marL="0">
+              <a:spcAft>
+                <a:spcPts val="400"/>
+              </a:spcAft>
+              <a:buNone/>
+            </a:pPr>
+            <a:r>
+              <a:rPr lang="en-US" sz="1500" dirty="0">
+                <a:solidFill>
+                  <a:srgbClr val="3A4659"/>
+                </a:solidFill>
+              </a:rPr>
+              <a:t>delivered and closed, returned to sender, or closed as lost or cancelled</a:t>
+            </a:r>
+            <a:endParaRPr lang="en-US" sz="1500" dirty="0"/>
+          </a:p>
+        </p:txBody>
+      </p:sp>
+      <p:sp>
+        <p:nvSpPr>
+          <p:cNvPr id="6" name="Text 4"/>
+          <p:cNvSpPr txBox="1"/>
+          <p:nvPr/>
+        </p:nvSpPr>
+        <p:spPr>
+          <a:xfrm>
+            <a:off x="548640" y="4206240"/>
+            <a:ext cx="6126480" cy="320040"/>
+          </a:xfrm>
+          <a:prstGeom prst="rect">
+            <a:avLst/>
+          </a:prstGeom>
+          <a:noFill/>
+          <a:ln/>
+        </p:spPr>
+        <p:txBody>
+          <a:bodyPr wrap="square" lIns="0" tIns="0" rIns="0" bIns="0" rtlCol="0" anchor="ctr"/>
+          <a:lstStyle/>
+          <a:p>
+            <a:pPr indent="0" marL="0">
+              <a:buNone/>
+            </a:pPr>
+            <a:r>
+              <a:rPr lang="en-US" sz="1600" b="1" dirty="0">
+                <a:solidFill>
+                  <a:srgbClr val="13203A"/>
+                </a:solidFill>
+              </a:rPr>
+              <a:t>Participants</a:t>
+            </a:r>
+            <a:endParaRPr lang="en-US" sz="1600" dirty="0"/>
+          </a:p>
+        </p:txBody>
+      </p:sp>
+      <p:sp>
+        <p:nvSpPr>
+          <p:cNvPr id="7" name="Text 5"/>
+          <p:cNvSpPr txBox="1"/>
+          <p:nvPr/>
+        </p:nvSpPr>
+        <p:spPr>
+          <a:xfrm>
+            <a:off x="548640" y="4572000"/>
+            <a:ext cx="6126480" cy="1463040"/>
+          </a:xfrm>
+          <a:prstGeom prst="rect">
+            <a:avLst/>
+          </a:prstGeom>
+          <a:noFill/>
+          <a:ln/>
+        </p:spPr>
+        <p:txBody>
+          <a:bodyPr wrap="square" lIns="0" tIns="0" rIns="0" bIns="0" rtlCol="0" anchor="t"/>
+          <a:lstStyle/>
+          <a:p>
+            <a:pPr indent="0" marL="0">
+              <a:buNone/>
+            </a:pPr>
+            <a:r>
+              <a:rPr lang="en-US" sz="1500" dirty="0">
+                <a:solidFill>
+                  <a:srgbClr val="3A4659"/>
+                </a:solidFill>
+              </a:rPr>
+              <a:t>Shipper / Customer · Control Tower / Dispatcher · Pickup Agent · Hub / Warehouse · Delivery Agent · Recipient · Claims Department</a:t>
+            </a:r>
+            <a:endParaRPr lang="en-US" sz="1500" dirty="0"/>
+          </a:p>
+        </p:txBody>
+      </p:sp>
+      <p:sp>
+        <p:nvSpPr>
+          <p:cNvPr id="8" name="tasks card"/>
+          <p:cNvSpPr/>
+          <p:nvPr/>
+        </p:nvSpPr>
+        <p:spPr>
+          <a:xfrm>
+            <a:off x="6995160" y="1234440"/>
+            <a:ext cx="4617720" cy="2148840"/>
+          </a:xfrm>
+          <a:prstGeom prst="roundRect">
+            <a:avLst>
+              <a:gd name="adj" fmla="val 5106"/>
+            </a:avLst>
+          </a:prstGeom>
+          <a:solidFill>
+            <a:srgbClr val="13203A"/>
+          </a:solidFill>
+          <a:ln w="12700">
+            <a:solidFill>
+              <a:srgbClr val="13203A"/>
+            </a:solidFill>
+            <a:prstDash val="solid"/>
+          </a:ln>
+        </p:spPr>
+      </p:sp>
+      <p:sp>
+        <p:nvSpPr>
+          <p:cNvPr id="9" name="Text 7"/>
+          <p:cNvSpPr txBox="1"/>
+          <p:nvPr/>
+        </p:nvSpPr>
+        <p:spPr>
+          <a:xfrm>
+            <a:off x="7269480" y="1371600"/>
+            <a:ext cx="4114800" cy="365760"/>
+          </a:xfrm>
+          <a:prstGeom prst="rect">
+            <a:avLst/>
+          </a:prstGeom>
+          <a:noFill/>
+          <a:ln/>
+        </p:spPr>
+        <p:txBody>
+          <a:bodyPr wrap="square" lIns="0" tIns="0" rIns="0" bIns="0" rtlCol="0" anchor="ctr"/>
+          <a:lstStyle/>
+          <a:p>
+            <a:pPr indent="0" marL="0">
+              <a:buNone/>
+            </a:pPr>
+            <a:r>
+              <a:rPr lang="en-US" sz="1600" b="1" dirty="0">
+                <a:solidFill>
+                  <a:srgbClr val="F0A970"/>
+                </a:solidFill>
+              </a:rPr>
+              <a:t>What we had to do</a:t>
+            </a:r>
+            <a:endParaRPr lang="en-US" sz="1600" dirty="0"/>
+          </a:p>
+        </p:txBody>
+      </p:sp>
+      <p:sp>
+        <p:nvSpPr>
+          <p:cNvPr id="10" name="Text 8"/>
+          <p:cNvSpPr txBox="1"/>
+          <p:nvPr/>
+        </p:nvSpPr>
+        <p:spPr>
+          <a:xfrm>
+            <a:off x="7269480" y="1783080"/>
+            <a:ext cx="4160520" cy="1463040"/>
+          </a:xfrm>
+          <a:prstGeom prst="rect">
+            <a:avLst/>
+          </a:prstGeom>
+          <a:noFill/>
+          <a:ln/>
+        </p:spPr>
+        <p:txBody>
+          <a:bodyPr wrap="square" lIns="0" tIns="0" rIns="0" bIns="0" rtlCol="0" anchor="t"/>
+          <a:lstStyle/>
+          <a:p>
+            <a:pPr marL="342900" indent="-342900">
+              <a:spcAft>
+                <a:spcPts val="400"/>
+              </a:spcAft>
+              <a:buSzPct val="100000"/>
+              <a:buFont typeface="+mj-lt"/>
+              <a:buAutoNum type="arabicPeriod" startAt="1"/>
+            </a:pPr>
+            <a:r>
+              <a:rPr lang="en-US" sz="1500" dirty="0">
+                <a:solidFill>
+                  <a:srgbClr val="FFFFFF"/>
+                </a:solidFill>
+              </a:rPr>
+              <a:t>Draw the happy path</a:t>
+            </a:r>
+            <a:endParaRPr lang="en-US" sz="1500" dirty="0"/>
+          </a:p>
+          <a:p>
+            <a:pPr marL="342900" indent="-342900">
+              <a:spcAft>
+                <a:spcPts val="400"/>
+              </a:spcAft>
+              <a:buSzPct val="100000"/>
+              <a:buFont typeface="+mj-lt"/>
+              <a:buAutoNum type="arabicPeriod" startAt="1"/>
+            </a:pPr>
+            <a:r>
+              <a:rPr lang="en-US" sz="1500" dirty="0">
+                <a:solidFill>
+                  <a:srgbClr val="FFFFFF"/>
+                </a:solidFill>
+              </a:rPr>
+              <a:t>List the failure paths</a:t>
+            </a:r>
+            <a:endParaRPr lang="en-US" sz="1500" dirty="0"/>
+          </a:p>
+          <a:p>
+            <a:pPr marL="342900" indent="-342900">
+              <a:spcAft>
+                <a:spcPts val="400"/>
+              </a:spcAft>
+              <a:buSzPct val="100000"/>
+              <a:buFont typeface="+mj-lt"/>
+              <a:buAutoNum type="arabicPeriod" startAt="1"/>
+            </a:pPr>
+            <a:r>
+              <a:rPr lang="en-US" sz="1500" dirty="0">
+                <a:solidFill>
+                  <a:srgbClr val="FFFFFF"/>
+                </a:solidFill>
+              </a:rPr>
+              <a:t>Solve each failure inside the diagram</a:t>
+            </a:r>
+            <a:endParaRPr lang="en-US" sz="1500" dirty="0"/>
+          </a:p>
+          <a:p>
+            <a:pPr marL="342900" indent="-342900">
+              <a:spcAft>
+                <a:spcPts val="400"/>
+              </a:spcAft>
+              <a:buSzPct val="100000"/>
+              <a:buFont typeface="+mj-lt"/>
+              <a:buAutoNum type="arabicPeriod" startAt="1"/>
+            </a:pPr>
+            <a:r>
+              <a:rPr lang="en-US" sz="1500" dirty="0">
+                <a:solidFill>
+                  <a:srgbClr val="FFFFFF"/>
+                </a:solidFill>
+              </a:rPr>
+              <a:t>Justify task types and gateways</a:t>
+            </a:r>
+            <a:endParaRPr lang="en-US" sz="1500" dirty="0"/>
+          </a:p>
+        </p:txBody>
+      </p:sp>
+      <p:sp>
+        <p:nvSpPr>
+          <p:cNvPr id="11" name="failure areas card"/>
+          <p:cNvSpPr/>
+          <p:nvPr/>
+        </p:nvSpPr>
+        <p:spPr>
+          <a:xfrm>
+            <a:off x="6995160" y="3566160"/>
+            <a:ext cx="4617720" cy="2560320"/>
+          </a:xfrm>
+          <a:prstGeom prst="roundRect">
+            <a:avLst>
+              <a:gd name="adj" fmla="val 4286"/>
+            </a:avLst>
+          </a:prstGeom>
+          <a:solidFill>
+            <a:srgbClr val="EEF1F5"/>
+          </a:solidFill>
+          <a:ln w="12700">
+            <a:solidFill>
+              <a:srgbClr val="EEF1F5"/>
+            </a:solidFill>
+            <a:prstDash val="solid"/>
+          </a:ln>
+        </p:spPr>
+      </p:sp>
+      <p:sp>
+        <p:nvSpPr>
+          <p:cNvPr id="12" name="Text 10"/>
+          <p:cNvSpPr txBox="1"/>
+          <p:nvPr/>
+        </p:nvSpPr>
+        <p:spPr>
+          <a:xfrm>
+            <a:off x="7269480" y="3703320"/>
+            <a:ext cx="4114800" cy="365760"/>
+          </a:xfrm>
+          <a:prstGeom prst="rect">
+            <a:avLst/>
+          </a:prstGeom>
+          <a:noFill/>
+          <a:ln/>
+        </p:spPr>
+        <p:txBody>
+          <a:bodyPr wrap="square" lIns="0" tIns="0" rIns="0" bIns="0" rtlCol="0" anchor="ctr"/>
+          <a:lstStyle/>
+          <a:p>
+            <a:pPr indent="0" marL="0">
+              <a:buNone/>
+            </a:pPr>
+            <a:r>
+              <a:rPr lang="en-US" sz="1600" b="1" dirty="0">
+                <a:solidFill>
+                  <a:srgbClr val="B4561C"/>
+                </a:solidFill>
+              </a:rPr>
+              <a:t>Where to look for failures</a:t>
+            </a:r>
+            <a:endParaRPr lang="en-US" sz="1600" dirty="0"/>
+          </a:p>
+        </p:txBody>
+      </p:sp>
+      <p:sp>
+        <p:nvSpPr>
+          <p:cNvPr id="13" name="Text 11"/>
+          <p:cNvSpPr txBox="1"/>
+          <p:nvPr/>
+        </p:nvSpPr>
+        <p:spPr>
+          <a:xfrm>
+            <a:off x="7269480" y="4114800"/>
+            <a:ext cx="4160520" cy="1920240"/>
+          </a:xfrm>
+          <a:prstGeom prst="rect">
+            <a:avLst/>
+          </a:prstGeom>
+          <a:noFill/>
+          <a:ln/>
+        </p:spPr>
+        <p:txBody>
+          <a:bodyPr wrap="square" lIns="0" tIns="0" rIns="0" bIns="0" rtlCol="0" anchor="t"/>
+          <a:lstStyle/>
+          <a:p>
+            <a:pPr marL="342900" indent="-342900">
+              <a:spcAft>
+                <a:spcPts val="300"/>
+              </a:spcAft>
+              <a:buSzPct val="100000"/>
+              <a:buChar char="•"/>
             </a:pPr>
             <a:r>
               <a:rPr lang="en-US" sz="1400" dirty="0">
                 <a:solidFill>
-                  <a:srgbClr val="5D6778"/>
+                  <a:srgbClr val="3A4659"/>
                 </a:solidFill>
               </a:rPr>
-              <a:t>Pools: Shipper / Customer, Recipient   ·   Lanes: Control Tower / Dispatcher, Pickup Agent, Hub / Warehouse, Claims Department, Delivery Agent</a:t>
+              <a:t>Pickup and address problems</a:t>
             </a:r>
             <a:endParaRPr lang="en-US" sz="1400" dirty="0"/>
           </a:p>
+          <a:p>
+            <a:pPr marL="342900" indent="-342900">
+              <a:spcAft>
+                <a:spcPts val="300"/>
+              </a:spcAft>
+              <a:buSzPct val="100000"/>
+              <a:buChar char="•"/>
+            </a:pPr>
+            <a:r>
+              <a:rPr lang="en-US" sz="1400" dirty="0">
+                <a:solidFill>
+                  <a:srgbClr val="3A4659"/>
+                </a:solidFill>
+              </a:rPr>
+              <a:t>Damage, loss and missing scans</a:t>
+            </a:r>
+            <a:endParaRPr lang="en-US" sz="1400" dirty="0"/>
+          </a:p>
+          <a:p>
+            <a:pPr marL="342900" indent="-342900">
+              <a:spcAft>
+                <a:spcPts val="300"/>
+              </a:spcAft>
+              <a:buSzPct val="100000"/>
+              <a:buChar char="•"/>
+            </a:pPr>
+            <a:r>
+              <a:rPr lang="en-US" sz="1400" dirty="0">
+                <a:solidFill>
+                  <a:srgbClr val="3A4659"/>
+                </a:solidFill>
+              </a:rPr>
+              <a:t>Delays: weather, breakdown, capacity</a:t>
+            </a:r>
+            <a:endParaRPr lang="en-US" sz="1400" dirty="0"/>
+          </a:p>
+          <a:p>
+            <a:pPr marL="342900" indent="-342900">
+              <a:spcAft>
+                <a:spcPts val="300"/>
+              </a:spcAft>
+              <a:buSzPct val="100000"/>
+              <a:buChar char="•"/>
+            </a:pPr>
+            <a:r>
+              <a:rPr lang="en-US" sz="1400" dirty="0">
+                <a:solidFill>
+                  <a:srgbClr val="3A4659"/>
+                </a:solidFill>
+              </a:rPr>
+              <a:t>Customs and documentation</a:t>
+            </a:r>
+            <a:endParaRPr lang="en-US" sz="1400" dirty="0"/>
+          </a:p>
+          <a:p>
+            <a:pPr marL="342900" indent="-342900">
+              <a:spcAft>
+                <a:spcPts val="300"/>
+              </a:spcAft>
+              <a:buSzPct val="100000"/>
+              <a:buChar char="•"/>
+            </a:pPr>
+            <a:r>
+              <a:rPr lang="en-US" sz="1400" dirty="0">
+                <a:solidFill>
+                  <a:srgbClr val="3A4659"/>
+                </a:solidFill>
+              </a:rPr>
+              <a:t>Recipient unavailable, refusal, COD failure</a:t>
+            </a:r>
+            <a:endParaRPr lang="en-US" sz="1400" dirty="0"/>
+          </a:p>
+          <a:p>
+            <a:pPr marL="342900" indent="-342900">
+              <a:spcAft>
+                <a:spcPts val="300"/>
+              </a:spcAft>
+              <a:buSzPct val="100000"/>
+              <a:buChar char="•"/>
+            </a:pPr>
+            <a:r>
+              <a:rPr lang="en-US" sz="1400" dirty="0">
+                <a:solidFill>
+                  <a:srgbClr val="3A4659"/>
+                </a:solidFill>
+              </a:rPr>
+              <a:t>Scanning failures, cancellation after dispatch</a:t>
+            </a:r>
+            <a:endParaRPr lang="en-US" sz="1400" dirty="0"/>
+          </a:p>
         </p:txBody>
       </p:sp>
-      <p:sp>
-        <p:nvSpPr>
-          <p:cNvPr id="4" name="diagram frame"/>
-          <p:cNvSpPr/>
-          <p:nvPr/>
-        </p:nvSpPr>
-        <p:spPr>
-          <a:xfrm>
-            <a:off x="1375532" y="1463040"/>
-            <a:ext cx="9440631" cy="4937760"/>
-          </a:xfrm>
-          <a:prstGeom prst="rect">
-            <a:avLst/>
-          </a:prstGeom>
-          <a:solidFill>
-            <a:srgbClr val="FFFFFF"/>
-          </a:solidFill>
-          <a:ln w="9525">
-            <a:solidFill>
-              <a:srgbClr val="DFE3EA"/>
-            </a:solidFill>
-            <a:prstDash val="solid"/>
-          </a:ln>
-        </p:spPr>
-      </p:sp>
-      <p:pic>
-        <p:nvPicPr>
-          <p:cNvPr id="5" name="Image 0" descr="BPMN diagram of the shipment process: a courier pool with five lanes between the Shipper and Recipient pools">    </p:cNvPr>
-          <p:cNvPicPr>
-            <a:picLocks noChangeAspect="1"/>
-          </p:cNvPicPr>
-          <p:nvPr/>
-        </p:nvPicPr>
-        <p:blipFill>
-          <a:blip r:embed="rId1"/>
-          <a:stretch>
-            <a:fillRect/>
-          </a:stretch>
-        </p:blipFill>
-        <p:spPr>
-          <a:xfrm>
-            <a:off x="1466972" y="1554480"/>
-            <a:ext cx="9257751" cy="4754880"/>
-          </a:xfrm>
-          <a:prstGeom prst="rect">
-            <a:avLst/>
-          </a:prstGeom>
-        </p:spPr>
-      </p:pic>
       <p:sp>
         <p:nvSpPr>
           <p:cNvPr id="25" name="Slide Number Placeholder 0"/>
@@ -2406,6 +2984,205 @@
                 <a:ea typeface="Cambria" pitchFamily="34" charset="-122"/>
                 <a:cs typeface="Cambria" pitchFamily="34" charset="-120"/>
               </a:rPr>
+              <a:t>Process overview</a:t>
+            </a:r>
+            <a:endParaRPr lang="en-US" sz="3200" dirty="0"/>
+          </a:p>
+        </p:txBody>
+      </p:sp>
+      <p:sp>
+        <p:nvSpPr>
+          <p:cNvPr id="3" name="Text 1"/>
+          <p:cNvSpPr txBox="1"/>
+          <p:nvPr/>
+        </p:nvSpPr>
+        <p:spPr>
+          <a:xfrm>
+            <a:off x="548640" y="1051560"/>
+            <a:ext cx="11064240" cy="365760"/>
+          </a:xfrm>
+          <a:prstGeom prst="rect">
+            <a:avLst/>
+          </a:prstGeom>
+          <a:noFill/>
+          <a:ln/>
+        </p:spPr>
+        <p:txBody>
+          <a:bodyPr wrap="square" lIns="0" tIns="0" rIns="0" bIns="0" rtlCol="0" anchor="ctr"/>
+          <a:lstStyle/>
+          <a:p>
+            <a:pPr indent="0" marL="0">
+              <a:buNone/>
+            </a:pPr>
+            <a:r>
+              <a:rPr lang="en-US" sz="1400" dirty="0">
+                <a:solidFill>
+                  <a:srgbClr val="5D6778"/>
+                </a:solidFill>
+              </a:rPr>
+              <a:t>Pools: Shipper / Customer, Recipient   ·   Lanes: Control Tower / Dispatcher, Pickup Agent, Hub / Warehouse, Claims Department, Delivery Agent</a:t>
+            </a:r>
+            <a:endParaRPr lang="en-US" sz="1400" dirty="0"/>
+          </a:p>
+        </p:txBody>
+      </p:sp>
+      <p:sp>
+        <p:nvSpPr>
+          <p:cNvPr id="4" name="diagram frame"/>
+          <p:cNvSpPr/>
+          <p:nvPr/>
+        </p:nvSpPr>
+        <p:spPr>
+          <a:xfrm>
+            <a:off x="1375532" y="1463040"/>
+            <a:ext cx="9440631" cy="4937760"/>
+          </a:xfrm>
+          <a:prstGeom prst="rect">
+            <a:avLst/>
+          </a:prstGeom>
+          <a:solidFill>
+            <a:srgbClr val="FFFFFF"/>
+          </a:solidFill>
+          <a:ln w="9525">
+            <a:solidFill>
+              <a:srgbClr val="DFE3EA"/>
+            </a:solidFill>
+            <a:prstDash val="solid"/>
+          </a:ln>
+        </p:spPr>
+      </p:sp>
+      <p:pic>
+        <p:nvPicPr>
+          <p:cNvPr id="5" name="Image 0" descr="BPMN diagram of the shipment process: a courier pool with five lanes between the Shipper and Recipient pools">    </p:cNvPr>
+          <p:cNvPicPr>
+            <a:picLocks noChangeAspect="1"/>
+          </p:cNvPicPr>
+          <p:nvPr/>
+        </p:nvPicPr>
+        <p:blipFill>
+          <a:blip r:embed="rId1"/>
+          <a:stretch>
+            <a:fillRect/>
+          </a:stretch>
+        </p:blipFill>
+        <p:spPr>
+          <a:xfrm>
+            <a:off x="1466972" y="1554480"/>
+            <a:ext cx="9257751" cy="4754880"/>
+          </a:xfrm>
+          <a:prstGeom prst="rect">
+            <a:avLst/>
+          </a:prstGeom>
+        </p:spPr>
+      </p:pic>
+      <p:sp>
+        <p:nvSpPr>
+          <p:cNvPr id="25" name="Slide Number Placeholder 0"/>
+          <p:cNvSpPr>
+            <a:spLocks noGrp="1"/>
+          </p:cNvSpPr>
+          <p:nvPr>
+            <p:ph type="sldNum" sz="quarter" idx="4294967295"/>
+          </p:nvPr>
+        </p:nvSpPr>
+        <p:spPr>
+          <a:xfrm>
+            <a:off x="11155680" y="6400800"/>
+            <a:ext cx="457200" cy="274320"/>
+          </a:xfrm>
+          <a:prstGeom prst="rect">
+            <a:avLst/>
+          </a:prstGeom>
+          <a:extLst>
+            <a:ext uri="{C572A759-6A51-4108-AA02-DFA0A04FC94B}">
+              <ma14:wrappingTextBoxFlag xmlns:ma14="http://schemas.microsoft.com/office/mac/drawingml/2011/main" val="0"/>
+            </a:ext>
+          </a:extLst>
+        </p:spPr>
+        <p:txBody>
+          <a:bodyPr/>
+          <a:lstStyle>
+            <a:lvl1pPr>
+              <a:defRPr sz="1000">
+                <a:solidFill>
+                  <a:srgbClr val="5D6778"/>
+                </a:solidFill>
+                <a:latin typeface="Calibri"/>
+                <a:ea typeface="Calibri"/>
+                <a:cs typeface="Calibri"/>
+              </a:defRPr>
+            </a:lvl1pPr>
+          </a:lstStyle>
+          <a:p>
+            <a:pPr algn="r"/>
+            <a:fld id="{F7021451-1387-4CA6-816F-3879F97B5CBC}" type="slidenum">
+              <a:rPr b="0" lang="en-US"/>
+              <a:t>3</a:t>
+            </a:fld>
+            <a:endParaRPr lang="en-US"/>
+          </a:p>
+        </p:txBody>
+      </p:sp>
+    </p:spTree>
+  </p:cSld>
+  <p:clrMapOvr>
+    <a:masterClrMapping/>
+  </p:clrMapOvr>
+</p:sld>
+</file>
+
+<file path=ppt/slides/slide4.xml><?xml version="1.0" encoding="utf-8"?>
+<p:sld xmlns:a="http://schemas.openxmlformats.org/drawingml/2006/main" xmlns:r="http://schemas.openxmlformats.org/officeDocument/2006/relationships" xmlns:p="http://schemas.openxmlformats.org/presentationml/2006/main">
+  <p:cSld name="Slide 4">
+    <p:spTree>
+      <p:nvGrpSpPr>
+        <p:cNvPr id="1" name=""/>
+        <p:cNvGrpSpPr/>
+        <p:nvPr/>
+      </p:nvGrpSpPr>
+      <p:grpSpPr>
+        <a:xfrm>
+          <a:off x="0" y="0"/>
+          <a:ext cx="0" cy="0"/>
+          <a:chOff x="0" y="0"/>
+          <a:chExt cx="0" cy="0"/>
+        </a:xfrm>
+      </p:grpSpPr>
+      <p:sp>
+        <p:nvSpPr>
+          <p:cNvPr id="2" name="Text 0"/>
+          <p:cNvSpPr/>
+          <p:nvPr>
+            <p:ph idx="100" type="title" hasCustomPrompt="1"/>
+          </p:nvPr>
+        </p:nvSpPr>
+        <p:spPr>
+          <a:xfrm>
+            <a:off x="548640" y="320040"/>
+            <a:ext cx="11064240" cy="731520"/>
+          </a:xfrm>
+          <a:prstGeom prst="rect">
+            <a:avLst/>
+          </a:prstGeom>
+          <a:noFill/>
+          <a:ln/>
+        </p:spPr>
+        <p:txBody>
+          <a:bodyPr wrap="square" lIns="0" tIns="0" rIns="0" bIns="0" rtlCol="0" anchor="ctr"/>
+          <a:lstStyle/>
+          <a:p>
+            <a:pPr algn="l" indent="0" marL="0">
+              <a:buNone/>
+            </a:pPr>
+            <a:r>
+              <a:rPr lang="en-US" sz="3200" b="1" dirty="0">
+                <a:solidFill>
+                  <a:srgbClr val="13203A"/>
+                </a:solidFill>
+                <a:latin typeface="Cambria" pitchFamily="34" charset="0"/>
+                <a:ea typeface="Cambria" pitchFamily="34" charset="-122"/>
+                <a:cs typeface="Cambria" pitchFamily="34" charset="-120"/>
+              </a:rPr>
               <a:t>Task types used</a:t>
             </a:r>
             <a:endParaRPr lang="en-US" sz="3200" dirty="0"/>
@@ -2414,7 +3191,7 @@
       </p:sp>
       <p:graphicFrame>
         <p:nvGraphicFramePr>
-          <p:cNvPr id="4" name="Table 0"/>
+          <p:cNvPr id="5" name="Table 0"/>
           <p:cNvGraphicFramePr>
             <a:graphicFrameLocks noGrp="1"/>
           </p:cNvGraphicFramePr>
@@ -4052,7 +4829,7 @@
             <a:pPr algn="r"/>
             <a:fld id="{F7021451-1387-4CA6-816F-3879F97B5CBC}" type="slidenum">
               <a:rPr b="0" lang="en-US"/>
-              <a:t>3</a:t>
+              <a:t>4</a:t>
             </a:fld>
             <a:endParaRPr lang="en-US"/>
           </a:p>
@@ -4066,9 +4843,9 @@
 </p:sld>
 </file>
 
-<file path=ppt/slides/slide4.xml><?xml version="1.0" encoding="utf-8"?>
+<file path=ppt/slides/slide5.xml><?xml version="1.0" encoding="utf-8"?>
 <p:sld xmlns:a="http://schemas.openxmlformats.org/drawingml/2006/main" xmlns:r="http://schemas.openxmlformats.org/officeDocument/2006/relationships" xmlns:p="http://schemas.openxmlformats.org/presentationml/2006/main">
-  <p:cSld name="Slide 4">
+  <p:cSld name="Slide 5">
     <p:spTree>
       <p:nvGrpSpPr>
         <p:cNvPr id="1" name=""/>
@@ -4726,7 +5503,7 @@
             <a:pPr algn="r"/>
             <a:fld id="{F7021451-1387-4CA6-816F-3879F97B5CBC}" type="slidenum">
               <a:rPr b="0" lang="en-US"/>
-              <a:t>4</a:t>
+              <a:t>5</a:t>
             </a:fld>
             <a:endParaRPr lang="en-US"/>
           </a:p>
@@ -4740,9 +5517,9 @@
 </p:sld>
 </file>
 
-<file path=ppt/slides/slide5.xml><?xml version="1.0" encoding="utf-8"?>
+<file path=ppt/slides/slide6.xml><?xml version="1.0" encoding="utf-8"?>
 <p:sld xmlns:a="http://schemas.openxmlformats.org/drawingml/2006/main" xmlns:r="http://schemas.openxmlformats.org/officeDocument/2006/relationships" xmlns:p="http://schemas.openxmlformats.org/presentationml/2006/main">
-  <p:cSld name="Slide 5">
+  <p:cSld name="Slide 6">
     <p:spTree>
       <p:nvGrpSpPr>
         <p:cNvPr id="1" name=""/>
@@ -4800,7 +5577,7 @@
       </p:sp>
       <p:graphicFrame>
         <p:nvGraphicFramePr>
-          <p:cNvPr id="6" name="Table 0"/>
+          <p:cNvPr id="7" name="Table 0"/>
           <p:cNvGraphicFramePr>
             <a:graphicFrameLocks noGrp="1"/>
           </p:cNvGraphicFramePr>
@@ -6552,7 +7329,7 @@
             <a:pPr algn="r"/>
             <a:fld id="{F7021451-1387-4CA6-816F-3879F97B5CBC}" type="slidenum">
               <a:rPr b="0" lang="en-US"/>
-              <a:t>5</a:t>
+              <a:t>6</a:t>
             </a:fld>
             <a:endParaRPr lang="en-US"/>
           </a:p>
@@ -6566,9 +7343,9 @@
 </p:sld>
 </file>
 
-<file path=ppt/slides/slide6.xml><?xml version="1.0" encoding="utf-8"?>
+<file path=ppt/slides/slide7.xml><?xml version="1.0" encoding="utf-8"?>
 <p:sld xmlns:a="http://schemas.openxmlformats.org/drawingml/2006/main" xmlns:r="http://schemas.openxmlformats.org/officeDocument/2006/relationships" xmlns:p="http://schemas.openxmlformats.org/presentationml/2006/main">
-  <p:cSld name="Slide 6">
+  <p:cSld name="Slide 7">
     <p:spTree>
       <p:nvGrpSpPr>
         <p:cNvPr id="1" name=""/>
@@ -7827,7 +8604,7 @@
             <a:pPr algn="r"/>
             <a:fld id="{F7021451-1387-4CA6-816F-3879F97B5CBC}" type="slidenum">
               <a:rPr b="0" lang="en-US"/>
-              <a:t>6</a:t>
+              <a:t>7</a:t>
             </a:fld>
             <a:endParaRPr lang="en-US"/>
           </a:p>
@@ -7841,9 +8618,9 @@
 </p:sld>
 </file>
 
-<file path=ppt/slides/slide7.xml><?xml version="1.0" encoding="utf-8"?>
+<file path=ppt/slides/slide8.xml><?xml version="1.0" encoding="utf-8"?>
 <p:sld xmlns:a="http://schemas.openxmlformats.org/drawingml/2006/main" xmlns:r="http://schemas.openxmlformats.org/officeDocument/2006/relationships" xmlns:p="http://schemas.openxmlformats.org/presentationml/2006/main">
-  <p:cSld name="Slide 7">
+  <p:cSld name="Slide 8">
     <p:spTree>
       <p:nvGrpSpPr>
         <p:cNvPr id="1" name=""/>
@@ -7901,7 +8678,7 @@
       </p:sp>
       <p:graphicFrame>
         <p:nvGraphicFramePr>
-          <p:cNvPr id="8" name="Table 0"/>
+          <p:cNvPr id="9" name="Table 0"/>
           <p:cNvGraphicFramePr>
             <a:graphicFrameLocks noGrp="1"/>
           </p:cNvGraphicFramePr>
@@ -10032,7 +10809,7 @@
             <a:pPr algn="r"/>
             <a:fld id="{F7021451-1387-4CA6-816F-3879F97B5CBC}" type="slidenum">
               <a:rPr b="0" lang="en-US"/>
-              <a:t>7</a:t>
+              <a:t>8</a:t>
             </a:fld>
             <a:endParaRPr lang="en-US"/>
           </a:p>
@@ -10046,9 +10823,9 @@
 </p:sld>
 </file>
 
-<file path=ppt/slides/slide8.xml><?xml version="1.0" encoding="utf-8"?>
+<file path=ppt/slides/slide9.xml><?xml version="1.0" encoding="utf-8"?>
 <p:sld xmlns:a="http://schemas.openxmlformats.org/drawingml/2006/main" xmlns:r="http://schemas.openxmlformats.org/officeDocument/2006/relationships" xmlns:p="http://schemas.openxmlformats.org/presentationml/2006/main">
-  <p:cSld name="Slide 8">
+  <p:cSld name="Slide 9">
     <p:spTree>
       <p:nvGrpSpPr>
         <p:cNvPr id="1" name=""/>
@@ -10390,7 +11167,7 @@
                 <a:ea typeface="Cambria" pitchFamily="34" charset="-122"/>
                 <a:cs typeface="Cambria" pitchFamily="34" charset="-120"/>
               </a:rPr>
-              <a:t>Thank you  ·  Questions?</a:t>
+              <a:t>Thank you</a:t>
             </a:r>
             <a:endParaRPr lang="en-US" sz="2200" dirty="0"/>
           </a:p>
